--- a/practice-en/lab-3-commercial-documents.pptx
+++ b/practice-en/lab-3-commercial-documents.pptx
@@ -511,17 +511,17 @@
           <a:lstStyle/>
           <a:p>
             <a:r>
-              <a:t>MỞ ĐẦU (3 phút)</a:t>
-            </a:r>
-          </a:p>
-          <a:p>
-            <a:r>
-              <a:t>• Trả bài số 2, nêu lỗi phổ biến.</a:t>
-            </a:r>
-          </a:p>
-          <a:p>
-            <a:r>
-              <a:t>• Chia cặp mua – bán ngay đầu buổi để cả buổi làm việc theo cặp.</a:t>
+              <a:t>OPENING (3 minutes)</a:t>
+            </a:r>
+          </a:p>
+          <a:p>
+            <a:r>
+              <a:t>• Hand back Lab 2 and name the common faults.</a:t>
+            </a:r>
+          </a:p>
+          <a:p>
+            <a:r>
+              <a:t>• Split into buyer–seller pairs at the start so the whole session runs in pairs.</a:t>
             </a:r>
           </a:p>
         </p:txBody>
@@ -607,7 +607,7 @@
           <a:lstStyle/>
           <a:p>
             <a:r>
-              <a:t>TIÊU CHÍ CHẤM (2 phút) — nhắc lại; nói rõ bài này tính vào điểm quá trình.</a:t>
+              <a:t>MARKING CRITERIA (2 minutes) — restate them; say plainly that this piece counts towards the coursework mark.</a:t>
             </a:r>
           </a:p>
         </p:txBody>
@@ -693,17 +693,17 @@
           <a:lstStyle/>
           <a:p>
             <a:r>
-              <a:t>KẾT THÚC HỌC PHẦN (2 phút)</a:t>
-            </a:r>
-          </a:p>
-          <a:p>
-            <a:r>
-              <a:t>• Cảm ơn lớp, nhắc lịch thi và cấu trúc đề.</a:t>
-            </a:r>
-          </a:p>
-          <a:p>
-            <a:r>
-              <a:t>• Nhắc: 200 câu trắc nghiệm và 8 video ôn tập đã có trên nhóm lớp.</a:t>
+              <a:t>END OF THE COURSE (2 minutes)</a:t>
+            </a:r>
+          </a:p>
+          <a:p>
+            <a:r>
+              <a:t>• Thank the class; remind them of the examination date and the structure of the paper.</a:t>
+            </a:r>
+          </a:p>
+          <a:p>
+            <a:r>
+              <a:t>• Remind them: the 200 multiple-choice questions and the 8 revision videos are already on the class group.</a:t>
             </a:r>
           </a:p>
         </p:txBody>
@@ -789,7 +789,7 @@
           <a:lstStyle/>
           <a:p>
             <a:r>
-              <a:t>MỤC TIÊU (2 phút) — 3 mục tiêu; nhấn sản phẩm cuối là BỘ HỒ SƠ hoàn chỉnh.</a:t>
+              <a:t>OBJECTIVES (2 minutes) — three of them; press it: what they leave with is a COMPLETE FILE.</a:t>
             </a:r>
           </a:p>
         </p:txBody>
@@ -875,7 +875,7 @@
           <a:lstStyle/>
           <a:p>
             <a:r>
-              <a:t>NỘI DUNG (1 phút) — thư tín, báo giá, hợp đồng và hai biên bản.</a:t>
+              <a:t>CONTENTS (1 minute) — the letter, the quotation, the contract and the two records.</a:t>
             </a:r>
           </a:p>
         </p:txBody>
@@ -961,7 +961,7 @@
           <a:lstStyle/>
           <a:p>
             <a:r>
-              <a:t>QUY TRÌNH (2 phút) — nhấn bước ĐỔI HỒ SƠ giữa các cặp để tìm điểm bất lợi.</a:t>
+              <a:t>THE PROCEDURE (2 minutes) — press the step where pairs SWAP FILES to hunt for terms that disadvantage them.</a:t>
             </a:r>
           </a:p>
         </p:txBody>
@@ -1047,22 +1047,22 @@
           <a:lstStyle/>
           <a:p>
             <a:r>
-              <a:t>THƯ TÍN (10 phút)</a:t>
-            </a:r>
-          </a:p>
-          <a:p>
-            <a:r>
-              <a:t>• Chiếu 1 thư viết kém và 1 thư viết tốt, cho lớp so sánh theo 5C.</a:t>
-            </a:r>
-          </a:p>
-          <a:p>
-            <a:r>
-              <a:t>• Nhấn lỗi email của sinh viên: tiêu đề "Thư ngỏ", viết hoa cả câu, dùng emoji, quên đính kèm.</a:t>
-            </a:r>
-          </a:p>
-          <a:p>
-            <a:r>
-              <a:t>• Cho mỗi cặp viết TIÊU ĐỀ và 2 câu mở đầu thư chào hàng, đọc vài bài.</a:t>
+              <a:t>BUSINESS LETTERS (10 minutes)</a:t>
+            </a:r>
+          </a:p>
+          <a:p>
+            <a:r>
+              <a:t>• Put a badly written and a well written letter up, and have the class compare them against the 5Cs.</a:t>
+            </a:r>
+          </a:p>
+          <a:p>
+            <a:r>
+              <a:t>• Press the mistakes students make in email: a subject line reading "A letter", SHOUTING IN CAPITALS, emoji, forgetting the attachment.</a:t>
+            </a:r>
+          </a:p>
+          <a:p>
+            <a:r>
+              <a:t>• Have each pair write the SUBJECT LINE and two opening sentences of a sales letter; read a few out.</a:t>
             </a:r>
           </a:p>
         </p:txBody>
@@ -1148,22 +1148,22 @@
           <a:lstStyle/>
           <a:p>
             <a:r>
-              <a:t>BÁO GIÁ (10 phút)</a:t>
-            </a:r>
-          </a:p>
-          <a:p>
-            <a:r>
-              <a:t>• Mở file Excel/Word mẫu, chỉ từng cột của bảng hàng hóa.</a:t>
-            </a:r>
-          </a:p>
-          <a:p>
-            <a:r>
-              <a:t>• Nhấn: tổng tiền ghi CẢ BẰNG SỐ VÀ BẰNG CHỮ, hai giá trị phải khớp.</a:t>
-            </a:r>
-          </a:p>
-          <a:p>
-            <a:r>
-              <a:t>• Nhấn mạnh THỜI HẠN HIỆU LỰC — hỏi lớp hậu quả nếu quên.</a:t>
+              <a:t>THE QUOTATION (10 minutes)</a:t>
+            </a:r>
+          </a:p>
+          <a:p>
+            <a:r>
+              <a:t>• Open the specimen Excel/Word file and point at each column of the goods table.</a:t>
+            </a:r>
+          </a:p>
+          <a:p>
+            <a:r>
+              <a:t>• Press: the total goes in BOTH FIGURES AND WORDS, and the two must agree.</a:t>
+            </a:r>
+          </a:p>
+          <a:p>
+            <a:r>
+              <a:t>• Press the VALIDITY PERIOD — ask the class what happens if it is left out.</a:t>
             </a:r>
           </a:p>
         </p:txBody>
@@ -1249,22 +1249,22 @@
           <a:lstStyle/>
           <a:p>
             <a:r>
-              <a:t>HỢP ĐỒNG (12 phút)</a:t>
-            </a:r>
-          </a:p>
-          <a:p>
-            <a:r>
-              <a:t>• Đi 7 điều khoản, mỗi điều một lưu ý rủi ro.</a:t>
-            </a:r>
-          </a:p>
-          <a:p>
-            <a:r>
-              <a:t>• Điều phạt vi phạm: nói mức phạt theo Luật Thương mại và vì sao cần ghi rõ.</a:t>
-            </a:r>
-          </a:p>
-          <a:p>
-            <a:r>
-              <a:t>• Cho lớp thảo luận nhanh: điều khoản nào có lợi cho bên mua, điều nào có lợi cho bên bán.</a:t>
+              <a:t>THE CONTRACT (12 minutes)</a:t>
+            </a:r>
+          </a:p>
+          <a:p>
+            <a:r>
+              <a:t>• Walk the seven clauses, one risk to watch for each.</a:t>
+            </a:r>
+          </a:p>
+          <a:p>
+            <a:r>
+              <a:t>• The penalty clause: give the rate under the Commercial Law and why it has to be stated.</a:t>
+            </a:r>
+          </a:p>
+          <a:p>
+            <a:r>
+              <a:t>• A quick discussion: which clauses favour the buyer, which favour the seller.</a:t>
             </a:r>
           </a:p>
         </p:txBody>
@@ -1350,22 +1350,22 @@
           <a:lstStyle/>
           <a:p>
             <a:r>
-              <a:t>NGHIỆM THU – THANH LÝ (8 phút)</a:t>
-            </a:r>
-          </a:p>
-          <a:p>
-            <a:r>
-              <a:t>• Nhấn: biên bản nghiệm thu phải GHI RÕ SỐ HỢP ĐỒNG.</a:t>
-            </a:r>
-          </a:p>
-          <a:p>
-            <a:r>
-              <a:t>• Thanh lý chỉ ký sau khi ĐỐI CHIẾU CÔNG NỢ xong.</a:t>
-            </a:r>
-          </a:p>
-          <a:p>
-            <a:r>
-              <a:t>• Hỏi lớp: nếu hàng thiếu 2 chiếc thì ghi gì vào biên bản nghiệm thu?</a:t>
+              <a:t>ACCEPTANCE AND LIQUIDATION (8 minutes)</a:t>
+            </a:r>
+          </a:p>
+          <a:p>
+            <a:r>
+              <a:t>• Press: the acceptance record must STATE THE CONTRACT NUMBER.</a:t>
+            </a:r>
+          </a:p>
+          <a:p>
+            <a:r>
+              <a:t>• Liquidation is signed only after the ACCOUNTS HAVE BEEN RECONCILED.</a:t>
+            </a:r>
+          </a:p>
+          <a:p>
+            <a:r>
+              <a:t>• Ask the class: if two items are missing from the delivery, what goes in the acceptance record?</a:t>
             </a:r>
           </a:p>
         </p:txBody>

--- a/practice-en/lab-3-commercial-documents.pptx
+++ b/practice-en/lab-3-commercial-documents.pptx
@@ -1451,10 +1451,28 @@
           <a:lstStyle/>
           <a:p>
             <a:r>
-              <a:rPr lang="en-US" dirty="0"/>
-              <a:t/>
-            </a:r>
-            <a:endParaRPr lang="en-US" dirty="0"/>
+              <a:t>THE EXERCISE (30 minutes)</a:t>
+            </a:r>
+          </a:p>
+          <a:p>
+            <a:r>
+              <a:t>• Each pair produces the full file; remind them to reuse their own group's case from Chapter 4.</a:t>
+            </a:r>
+          </a:p>
+          <a:p>
+            <a:r>
+              <a:t>• 20 minutes drafting, 10 minutes swapping files with another pair to hunt for faults.</a:t>
+            </a:r>
+          </a:p>
+          <a:p>
+            <a:r>
+              <a:t>• Require each pair to write down three disadvantageous terms they found — this is where you are marking their thinking.</a:t>
+            </a:r>
+          </a:p>
+          <a:p>
+            <a:r>
+              <a:t>• Close the course: remind students of the examination date and what it covers.</a:t>
+            </a:r>
           </a:p>
         </p:txBody>
       </p:sp>
